--- a/documentation/Wrist Strap Monitor System - Report.pptx
+++ b/documentation/Wrist Strap Monitor System - Report.pptx
@@ -107,6 +107,11 @@
       </a:defRPr>
     </a:lvl9pPr>
   </p:defaultTextStyle>
+  <p:extLst>
+    <p:ext uri="{EFAFB233-063F-42B5-8137-9DF3F51BA10A}">
+      <p15:sldGuideLst xmlns:p15="http://schemas.microsoft.com/office/powerpoint/2012/main"/>
+    </p:ext>
+  </p:extLst>
 </p:presentation>
 </file>
 
@@ -257,7 +262,7 @@
           <a:p>
             <a:fld id="{ACC2F5DE-EBA5-4A4B-8CEF-D4D7EFFD7849}" type="datetimeFigureOut">
               <a:rPr lang="en-US" smtClean="0"/>
-              <a:t>5/20/2025</a:t>
+              <a:t>6/8/2025</a:t>
             </a:fld>
             <a:endParaRPr lang="en-US"/>
           </a:p>
@@ -455,7 +460,7 @@
           <a:p>
             <a:fld id="{ACC2F5DE-EBA5-4A4B-8CEF-D4D7EFFD7849}" type="datetimeFigureOut">
               <a:rPr lang="en-US" smtClean="0"/>
-              <a:t>5/20/2025</a:t>
+              <a:t>6/8/2025</a:t>
             </a:fld>
             <a:endParaRPr lang="en-US"/>
           </a:p>
@@ -663,7 +668,7 @@
           <a:p>
             <a:fld id="{ACC2F5DE-EBA5-4A4B-8CEF-D4D7EFFD7849}" type="datetimeFigureOut">
               <a:rPr lang="en-US" smtClean="0"/>
-              <a:t>5/20/2025</a:t>
+              <a:t>6/8/2025</a:t>
             </a:fld>
             <a:endParaRPr lang="en-US"/>
           </a:p>
@@ -861,7 +866,7 @@
           <a:p>
             <a:fld id="{ACC2F5DE-EBA5-4A4B-8CEF-D4D7EFFD7849}" type="datetimeFigureOut">
               <a:rPr lang="en-US" smtClean="0"/>
-              <a:t>5/20/2025</a:t>
+              <a:t>6/8/2025</a:t>
             </a:fld>
             <a:endParaRPr lang="en-US"/>
           </a:p>
@@ -1136,7 +1141,7 @@
           <a:p>
             <a:fld id="{ACC2F5DE-EBA5-4A4B-8CEF-D4D7EFFD7849}" type="datetimeFigureOut">
               <a:rPr lang="en-US" smtClean="0"/>
-              <a:t>5/20/2025</a:t>
+              <a:t>6/8/2025</a:t>
             </a:fld>
             <a:endParaRPr lang="en-US"/>
           </a:p>
@@ -1401,7 +1406,7 @@
           <a:p>
             <a:fld id="{ACC2F5DE-EBA5-4A4B-8CEF-D4D7EFFD7849}" type="datetimeFigureOut">
               <a:rPr lang="en-US" smtClean="0"/>
-              <a:t>5/20/2025</a:t>
+              <a:t>6/8/2025</a:t>
             </a:fld>
             <a:endParaRPr lang="en-US"/>
           </a:p>
@@ -1813,7 +1818,7 @@
           <a:p>
             <a:fld id="{ACC2F5DE-EBA5-4A4B-8CEF-D4D7EFFD7849}" type="datetimeFigureOut">
               <a:rPr lang="en-US" smtClean="0"/>
-              <a:t>5/20/2025</a:t>
+              <a:t>6/8/2025</a:t>
             </a:fld>
             <a:endParaRPr lang="en-US"/>
           </a:p>
@@ -1954,7 +1959,7 @@
           <a:p>
             <a:fld id="{ACC2F5DE-EBA5-4A4B-8CEF-D4D7EFFD7849}" type="datetimeFigureOut">
               <a:rPr lang="en-US" smtClean="0"/>
-              <a:t>5/20/2025</a:t>
+              <a:t>6/8/2025</a:t>
             </a:fld>
             <a:endParaRPr lang="en-US"/>
           </a:p>
@@ -2067,7 +2072,7 @@
           <a:p>
             <a:fld id="{ACC2F5DE-EBA5-4A4B-8CEF-D4D7EFFD7849}" type="datetimeFigureOut">
               <a:rPr lang="en-US" smtClean="0"/>
-              <a:t>5/20/2025</a:t>
+              <a:t>6/8/2025</a:t>
             </a:fld>
             <a:endParaRPr lang="en-US"/>
           </a:p>
@@ -2378,7 +2383,7 @@
           <a:p>
             <a:fld id="{ACC2F5DE-EBA5-4A4B-8CEF-D4D7EFFD7849}" type="datetimeFigureOut">
               <a:rPr lang="en-US" smtClean="0"/>
-              <a:t>5/20/2025</a:t>
+              <a:t>6/8/2025</a:t>
             </a:fld>
             <a:endParaRPr lang="en-US"/>
           </a:p>
@@ -2666,7 +2671,7 @@
           <a:p>
             <a:fld id="{ACC2F5DE-EBA5-4A4B-8CEF-D4D7EFFD7849}" type="datetimeFigureOut">
               <a:rPr lang="en-US" smtClean="0"/>
-              <a:t>5/20/2025</a:t>
+              <a:t>6/8/2025</a:t>
             </a:fld>
             <a:endParaRPr lang="en-US"/>
           </a:p>
@@ -2907,7 +2912,7 @@
           <a:p>
             <a:fld id="{ACC2F5DE-EBA5-4A4B-8CEF-D4D7EFFD7849}" type="datetimeFigureOut">
               <a:rPr lang="en-US" smtClean="0"/>
-              <a:t>5/20/2025</a:t>
+              <a:t>6/8/2025</a:t>
             </a:fld>
             <a:endParaRPr lang="en-US"/>
           </a:p>
@@ -4601,10 +4606,10 @@
       </p:sp>
       <p:graphicFrame>
         <p:nvGraphicFramePr>
-          <p:cNvPr id="8" name="Table 7">
-            <a:extLst>
-              <a:ext uri="{FF2B5EF4-FFF2-40B4-BE49-F238E27FC236}">
-                <a16:creationId xmlns:a16="http://schemas.microsoft.com/office/drawing/2014/main" id="{0C323CAF-EA09-4CFB-AA29-5B451807BC24}"/>
+          <p:cNvPr id="7" name="Table 6">
+            <a:extLst>
+              <a:ext uri="{FF2B5EF4-FFF2-40B4-BE49-F238E27FC236}">
+                <a16:creationId xmlns:a16="http://schemas.microsoft.com/office/drawing/2014/main" id="{EAD65126-3FC6-4F3E-BA34-BAF3D694ED11}"/>
               </a:ext>
             </a:extLst>
           </p:cNvPr>
@@ -4612,7 +4617,11 @@
             <a:graphicFrameLocks noGrp="1"/>
           </p:cNvGraphicFramePr>
           <p:nvPr>
-            <p:extLst/>
+            <p:extLst>
+              <p:ext uri="{D42A27DB-BD31-4B8C-83A1-F6EECF244321}">
+                <p14:modId xmlns:p14="http://schemas.microsoft.com/office/powerpoint/2010/main" val="2636940144"/>
+              </p:ext>
+            </p:extLst>
           </p:nvPr>
         </p:nvGraphicFramePr>
         <p:xfrm>
@@ -4623,7 +4632,7 @@
           <a:graphicData uri="http://schemas.openxmlformats.org/drawingml/2006/table">
             <a:tbl>
               <a:tblPr firstRow="1" bandRow="1">
-                <a:tableStyleId>{5C22544A-7EE6-4342-B048-85BDC9FD1C3A}</a:tableStyleId>
+                <a:tableStyleId>{93296810-A885-4BE3-A3E7-6D5BEEA58F35}</a:tableStyleId>
               </a:tblPr>
               <a:tblGrid>
                 <a:gridCol w="3178067">
@@ -4672,15 +4681,16 @@
                         <a:defRPr/>
                       </a:pPr>
                       <a:r>
-                        <a:rPr lang="en-US" sz="1600">
-                          <a:solidFill>
-                            <a:schemeClr val="tx1"/>
-                          </a:solidFill>
-                          <a:latin typeface="Segoe UI" panose="020B0502040204020203" pitchFamily="34" charset="0"/>
-                          <a:cs typeface="Segoe UI" panose="020B0502040204020203" pitchFamily="34" charset="0"/>
-                        </a:rPr>
+                        <a:rPr lang="en-US" sz="1600"/>
                         <a:t>Ghi chú trong quá trình phát triển dự án</a:t>
                       </a:r>
+                      <a:endParaRPr lang="en-US" sz="1600">
+                        <a:solidFill>
+                          <a:schemeClr val="tx1"/>
+                        </a:solidFill>
+                        <a:latin typeface="Segoe UI" panose="020B0502040204020203" pitchFamily="34" charset="0"/>
+                        <a:cs typeface="Segoe UI" panose="020B0502040204020203" pitchFamily="34" charset="0"/>
+                      </a:endParaRPr>
                     </a:p>
                   </a:txBody>
                   <a:tcPr anchor="ctr"/>
@@ -4719,12 +4729,13 @@
                     <a:p>
                       <a:pPr algn="ctr"/>
                       <a:r>
-                        <a:rPr lang="en-US" sz="1600" b="1">
-                          <a:latin typeface="Segoe UI" panose="020B0502040204020203" pitchFamily="34" charset="0"/>
-                          <a:cs typeface="Segoe UI" panose="020B0502040204020203" pitchFamily="34" charset="0"/>
-                        </a:rPr>
+                        <a:rPr lang="en-US" sz="1600"/>
                         <a:t>Nội dung</a:t>
                       </a:r>
+                      <a:endParaRPr lang="en-US" sz="1600" b="1">
+                        <a:latin typeface="Segoe UI" panose="020B0502040204020203" pitchFamily="34" charset="0"/>
+                        <a:cs typeface="Segoe UI" panose="020B0502040204020203" pitchFamily="34" charset="0"/>
+                      </a:endParaRPr>
                     </a:p>
                   </a:txBody>
                   <a:tcPr anchor="ctr"/>
@@ -4736,12 +4747,13 @@
                     <a:p>
                       <a:pPr algn="ctr"/>
                       <a:r>
-                        <a:rPr lang="en-US" sz="1600" b="1">
-                          <a:latin typeface="Segoe UI" panose="020B0502040204020203" pitchFamily="34" charset="0"/>
-                          <a:cs typeface="Segoe UI" panose="020B0502040204020203" pitchFamily="34" charset="0"/>
-                        </a:rPr>
+                        <a:rPr lang="en-US" sz="1600"/>
                         <a:t>Thời gian</a:t>
                       </a:r>
+                      <a:endParaRPr lang="en-US" sz="1600" b="1">
+                        <a:latin typeface="Segoe UI" panose="020B0502040204020203" pitchFamily="34" charset="0"/>
+                        <a:cs typeface="Segoe UI" panose="020B0502040204020203" pitchFamily="34" charset="0"/>
+                      </a:endParaRPr>
                     </a:p>
                   </a:txBody>
                   <a:tcPr anchor="ctr"/>
@@ -4753,12 +4765,13 @@
                     <a:p>
                       <a:pPr algn="ctr"/>
                       <a:r>
-                        <a:rPr lang="en-US" sz="1600" b="1">
-                          <a:latin typeface="Segoe UI" panose="020B0502040204020203" pitchFamily="34" charset="0"/>
-                          <a:cs typeface="Segoe UI" panose="020B0502040204020203" pitchFamily="34" charset="0"/>
-                        </a:rPr>
+                        <a:rPr lang="en-US" sz="1600"/>
                         <a:t>Ghi chú</a:t>
                       </a:r>
+                      <a:endParaRPr lang="en-US" sz="1600" b="1">
+                        <a:latin typeface="Segoe UI" panose="020B0502040204020203" pitchFamily="34" charset="0"/>
+                        <a:cs typeface="Segoe UI" panose="020B0502040204020203" pitchFamily="34" charset="0"/>
+                      </a:endParaRPr>
                     </a:p>
                   </a:txBody>
                   <a:tcPr anchor="ctr"/>
